--- a/Desafio 2 - Projeto - 11062025/Versões Pitch-Deck/Grupo01_Pitch_Deck_do_Projeto_Desafio_4.pptx
+++ b/Desafio 2 - Projeto - 11062025/Versões Pitch-Deck/Grupo01_Pitch_Deck_do_Projeto_Desafio_4.pptx
@@ -278,7 +278,7 @@
       <p15:sldGuideLst xmlns:p15="http://schemas.microsoft.com/office/powerpoint/2012/main"/>
     </p:ext>
     <p:ext uri="GoogleSlidesCustomDataVersion2">
-      <go:slidesCustomData xmlns:go="http://customooxmlschemas.google.com/" xmlns:ahyp="http://schemas.microsoft.com/office/drawing/2018/hyperlinkcolor" xmlns:p15="http://schemas.microsoft.com/office/powerpoint/2012/main" xmlns:p14="http://schemas.microsoft.com/office/powerpoint/2010/main" xmlns:com="http://schemas.openxmlformats.org/drawingml/2006/compatibility" xmlns:pvml="urn:schemas-microsoft-com:office:powerpoint" xmlns:v="urn:schemas-microsoft-com:vml" xmlns:o="urn:schemas-microsoft-com:office:office" xmlns:dgm="http://schemas.openxmlformats.org/drawingml/2006/diagram" xmlns:c="http://schemas.openxmlformats.org/drawingml/2006/chart" xmlns:mv="urn:schemas-microsoft-com:mac:vml" xmlns:mc="http://schemas.openxmlformats.org/markup-compatibility/2006" xmlns="" r:id="rId25" roundtripDataSignature="AMtx7mgA6guGlN7WrxfpXcjI7GTyAJIbhA=="/>
+      <go:slidesCustomData xmlns="" xmlns:mc="http://schemas.openxmlformats.org/markup-compatibility/2006" xmlns:mv="urn:schemas-microsoft-com:mac:vml" xmlns:c="http://schemas.openxmlformats.org/drawingml/2006/chart" xmlns:dgm="http://schemas.openxmlformats.org/drawingml/2006/diagram" xmlns:o="urn:schemas-microsoft-com:office:office" xmlns:v="urn:schemas-microsoft-com:vml" xmlns:pvml="urn:schemas-microsoft-com:office:powerpoint" xmlns:com="http://schemas.openxmlformats.org/drawingml/2006/compatibility" xmlns:p14="http://schemas.microsoft.com/office/powerpoint/2010/main" xmlns:p15="http://schemas.microsoft.com/office/powerpoint/2012/main" xmlns:ahyp="http://schemas.microsoft.com/office/drawing/2018/hyperlinkcolor" xmlns:go="http://customooxmlschemas.google.com/" r:id="rId25" roundtripDataSignature="AMtx7mgA6guGlN7WrxfpXcjI7GTyAJIbhA=="/>
     </p:ext>
   </p:extLst>
 </p:presentation>
@@ -3635,8 +3635,8 @@
         </p:nvSpPr>
         <p:spPr>
           <a:xfrm>
-            <a:off x="3005733" y="1051917"/>
-            <a:ext cx="1403747" cy="521494"/>
+            <a:off x="3005733" y="1052977"/>
+            <a:ext cx="3449254" cy="519373"/>
           </a:xfrm>
           <a:prstGeom prst="rect">
             <a:avLst/>
@@ -3667,7 +3667,7 @@
               <a:buNone/>
             </a:pPr>
             <a:r>
-              <a:rPr lang="en-US" sz="3375" b="1" i="0" u="none" strike="noStrike" cap="none">
+              <a:rPr lang="en-US" sz="3375" b="1" i="0" u="none" strike="noStrike" cap="none" dirty="0" err="1">
                 <a:solidFill>
                   <a:srgbClr val="FFFFFF"/>
                 </a:solidFill>
@@ -3676,70 +3676,43 @@
                 <a:cs typeface="Montserrat"/>
                 <a:sym typeface="Montserrat"/>
               </a:rPr>
-              <a:t>NF AI</a:t>
-            </a:r>
-            <a:endParaRPr sz="3375" b="0" i="0" u="none" strike="noStrike" cap="none">
-              <a:solidFill>
-                <a:schemeClr val="dk1"/>
-              </a:solidFill>
-              <a:latin typeface="Calibri"/>
-              <a:ea typeface="Calibri"/>
-              <a:cs typeface="Calibri"/>
-              <a:sym typeface="Calibri"/>
-            </a:endParaRPr>
-          </a:p>
-        </p:txBody>
-      </p:sp>
-      <p:sp>
-        <p:nvSpPr>
-          <p:cNvPr id="16" name="Google Shape;16;p1"/>
-          <p:cNvSpPr/>
-          <p:nvPr/>
-        </p:nvSpPr>
-        <p:spPr>
-          <a:xfrm>
-            <a:off x="4338042" y="1051917"/>
-            <a:ext cx="1871663" cy="521494"/>
-          </a:xfrm>
-          <a:prstGeom prst="rect">
-            <a:avLst/>
-          </a:prstGeom>
-          <a:noFill/>
-          <a:ln>
-            <a:noFill/>
-          </a:ln>
-        </p:spPr>
-        <p:txBody>
-          <a:bodyPr spcFirstLastPara="1" wrap="square" lIns="0" tIns="0" rIns="0" bIns="0" anchor="ctr" anchorCtr="0">
-            <a:spAutoFit/>
-          </a:bodyPr>
-          <a:lstStyle/>
-          <a:p>
-            <a:pPr marL="0" marR="0" lvl="0" indent="0" algn="ctr" rtl="0">
-              <a:spcBef>
-                <a:spcPts val="0"/>
-              </a:spcBef>
-              <a:spcAft>
-                <a:spcPts val="0"/>
-              </a:spcAft>
-              <a:buClr>
-                <a:srgbClr val="27AE60"/>
-              </a:buClr>
-              <a:buSzPts val="3375"/>
-              <a:buFont typeface="Montserrat"/>
-              <a:buNone/>
-            </a:pPr>
-            <a:r>
-              <a:rPr lang="en-US" sz="3375" b="1" i="0" u="none" strike="noStrike" cap="none" dirty="0" err="1">
-                <a:solidFill>
-                  <a:srgbClr val="27AE60"/>
+              <a:t>Agente</a:t>
+            </a:r>
+            <a:r>
+              <a:rPr lang="en-US" sz="3375" b="1" i="0" u="none" strike="noStrike" cap="none" dirty="0">
+                <a:solidFill>
+                  <a:srgbClr val="FFFFFF"/>
                 </a:solidFill>
                 <a:latin typeface="Montserrat"/>
                 <a:ea typeface="Montserrat"/>
                 <a:cs typeface="Montserrat"/>
                 <a:sym typeface="Montserrat"/>
               </a:rPr>
-              <a:t>Extrator</a:t>
+              <a:t> </a:t>
+            </a:r>
+            <a:r>
+              <a:rPr lang="en-US" sz="3375" b="1" i="0" u="none" strike="noStrike" cap="none" dirty="0" err="1">
+                <a:solidFill>
+                  <a:srgbClr val="FFFFFF"/>
+                </a:solidFill>
+                <a:latin typeface="Montserrat"/>
+                <a:ea typeface="Montserrat"/>
+                <a:cs typeface="Montserrat"/>
+                <a:sym typeface="Montserrat"/>
+              </a:rPr>
+              <a:t>NFe</a:t>
+            </a:r>
+            <a:r>
+              <a:rPr lang="en-US" sz="3375" b="1" i="0" u="none" strike="noStrike" cap="none" dirty="0">
+                <a:solidFill>
+                  <a:srgbClr val="FFFFFF"/>
+                </a:solidFill>
+                <a:latin typeface="Montserrat"/>
+                <a:ea typeface="Montserrat"/>
+                <a:cs typeface="Montserrat"/>
+                <a:sym typeface="Montserrat"/>
+              </a:rPr>
+              <a:t> </a:t>
             </a:r>
             <a:endParaRPr sz="3375" b="0" i="0" u="none" strike="noStrike" cap="none" dirty="0">
               <a:solidFill>
@@ -5011,8 +4984,8 @@
         </p:nvSpPr>
         <p:spPr>
           <a:xfrm>
-            <a:off x="5248255" y="1647263"/>
-            <a:ext cx="3058248" cy="2539157"/>
+            <a:off x="5248255" y="2155094"/>
+            <a:ext cx="3058248" cy="1523494"/>
           </a:xfrm>
           <a:prstGeom prst="rect">
             <a:avLst/>
@@ -5040,41 +5013,8 @@
                 </a:solidFill>
                 <a:latin typeface="Montserrat" panose="00000500000000000000" pitchFamily="2" charset="0"/>
               </a:rPr>
-              <a:t>Ana Paola </a:t>
-            </a:r>
-            <a:r>
-              <a:rPr lang="pt-BR" sz="1100" dirty="0" err="1">
-                <a:solidFill>
-                  <a:schemeClr val="bg1"/>
-                </a:solidFill>
-                <a:latin typeface="Montserrat" panose="00000500000000000000" pitchFamily="2" charset="0"/>
-              </a:rPr>
-              <a:t>Zarate</a:t>
-            </a:r>
-            <a:r>
-              <a:rPr lang="pt-BR" sz="1100" dirty="0">
-                <a:solidFill>
-                  <a:schemeClr val="bg1"/>
-                </a:solidFill>
-                <a:latin typeface="Montserrat" panose="00000500000000000000" pitchFamily="2" charset="0"/>
-              </a:rPr>
-              <a:t> </a:t>
-            </a:r>
-            <a:r>
-              <a:rPr lang="pt-BR" sz="1100" dirty="0" err="1">
-                <a:solidFill>
-                  <a:schemeClr val="bg1"/>
-                </a:solidFill>
-                <a:latin typeface="Montserrat" panose="00000500000000000000" pitchFamily="2" charset="0"/>
-              </a:rPr>
-              <a:t>Zequita</a:t>
-            </a:r>
-            <a:endParaRPr lang="pt-BR" sz="1100" dirty="0">
-              <a:solidFill>
-                <a:schemeClr val="bg1"/>
-              </a:solidFill>
-              <a:latin typeface="Montserrat" panose="00000500000000000000" pitchFamily="2" charset="0"/>
-            </a:endParaRPr>
+              <a:t>Antonio João Nascimento Dantas</a:t>
+            </a:r>
           </a:p>
           <a:p>
             <a:pPr lvl="0">
@@ -5083,22 +5023,13 @@
               </a:lnSpc>
             </a:pPr>
             <a:r>
-              <a:rPr lang="pt-BR" sz="1100" dirty="0" err="1">
+              <a:rPr lang="pt-BR" sz="1100" dirty="0">
                 <a:solidFill>
                   <a:schemeClr val="bg1"/>
                 </a:solidFill>
                 <a:latin typeface="Montserrat" panose="00000500000000000000" pitchFamily="2" charset="0"/>
               </a:rPr>
-              <a:t>Antonio</a:t>
-            </a:r>
-            <a:r>
-              <a:rPr lang="pt-BR" sz="1100" dirty="0">
-                <a:solidFill>
-                  <a:schemeClr val="bg1"/>
-                </a:solidFill>
-                <a:latin typeface="Montserrat" panose="00000500000000000000" pitchFamily="2" charset="0"/>
-              </a:rPr>
-              <a:t> João Nascimento Dantas</a:t>
+              <a:t>Daniel Correa Rodrigues</a:t>
             </a:r>
           </a:p>
           <a:p>
@@ -5114,23 +5045,8 @@
                 </a:solidFill>
                 <a:latin typeface="Montserrat" panose="00000500000000000000" pitchFamily="2" charset="0"/>
               </a:rPr>
-              <a:t>Aurélio Marques </a:t>
-            </a:r>
-            <a:r>
-              <a:rPr lang="pt-BR" sz="1100" dirty="0" err="1">
-                <a:solidFill>
-                  <a:schemeClr val="bg1"/>
-                </a:solidFill>
-                <a:latin typeface="Montserrat" panose="00000500000000000000" pitchFamily="2" charset="0"/>
-              </a:rPr>
-              <a:t>Morbeck</a:t>
-            </a:r>
-            <a:endParaRPr lang="pt-BR" sz="1100" dirty="0">
-              <a:solidFill>
-                <a:schemeClr val="bg1"/>
-              </a:solidFill>
-              <a:latin typeface="Montserrat" panose="00000500000000000000" pitchFamily="2" charset="0"/>
-            </a:endParaRPr>
+              <a:t>Eduarda Silveira Cardoso</a:t>
+            </a:r>
           </a:p>
           <a:p>
             <a:pPr lvl="0">
@@ -5139,13 +5055,22 @@
               </a:lnSpc>
             </a:pPr>
             <a:r>
+              <a:rPr lang="pt-BR" sz="1100" dirty="0" err="1">
+                <a:solidFill>
+                  <a:schemeClr val="bg1"/>
+                </a:solidFill>
+                <a:latin typeface="Montserrat" panose="00000500000000000000" pitchFamily="2" charset="0"/>
+              </a:rPr>
+              <a:t>Lorrane</a:t>
+            </a:r>
+            <a:r>
               <a:rPr lang="pt-BR" sz="1100" dirty="0">
                 <a:solidFill>
                   <a:schemeClr val="bg1"/>
                 </a:solidFill>
                 <a:latin typeface="Montserrat" panose="00000500000000000000" pitchFamily="2" charset="0"/>
               </a:rPr>
-              <a:t>Daniel Correa Rodrigues</a:t>
+              <a:t> da F C Santos Santana</a:t>
             </a:r>
           </a:p>
           <a:p>
@@ -5161,7 +5086,7 @@
                 </a:solidFill>
                 <a:latin typeface="Montserrat" panose="00000500000000000000" pitchFamily="2" charset="0"/>
               </a:rPr>
-              <a:t>Eduarda Silveira Cardoso</a:t>
+              <a:t>Luciane Schumacher</a:t>
             </a:r>
           </a:p>
           <a:p>
@@ -5171,102 +5096,14 @@
               </a:lnSpc>
             </a:pPr>
             <a:r>
-              <a:rPr lang="pt-BR" sz="1100" dirty="0" err="1">
+              <a:rPr lang="pt-BR" sz="1100" dirty="0">
                 <a:solidFill>
                   <a:schemeClr val="bg1"/>
                 </a:solidFill>
                 <a:latin typeface="Montserrat" panose="00000500000000000000" pitchFamily="2" charset="0"/>
               </a:rPr>
-              <a:t>Lorrane</a:t>
-            </a:r>
-            <a:r>
-              <a:rPr lang="pt-BR" sz="1100" dirty="0">
-                <a:solidFill>
-                  <a:schemeClr val="bg1"/>
-                </a:solidFill>
-                <a:latin typeface="Montserrat" panose="00000500000000000000" pitchFamily="2" charset="0"/>
-              </a:rPr>
-              <a:t> da F C Santos Santana</a:t>
-            </a:r>
-          </a:p>
-          <a:p>
-            <a:pPr lvl="0">
-              <a:lnSpc>
-                <a:spcPct val="150000"/>
-              </a:lnSpc>
-            </a:pPr>
-            <a:r>
-              <a:rPr lang="pt-BR" sz="1100" dirty="0">
-                <a:solidFill>
-                  <a:schemeClr val="bg1"/>
-                </a:solidFill>
-                <a:latin typeface="Montserrat" panose="00000500000000000000" pitchFamily="2" charset="0"/>
-              </a:rPr>
-              <a:t>Luciane Schumacher</a:t>
-            </a:r>
-          </a:p>
-          <a:p>
-            <a:pPr lvl="0">
-              <a:lnSpc>
-                <a:spcPct val="150000"/>
-              </a:lnSpc>
-            </a:pPr>
-            <a:r>
-              <a:rPr lang="pt-BR" sz="1100" dirty="0">
-                <a:solidFill>
-                  <a:schemeClr val="bg1"/>
-                </a:solidFill>
-                <a:latin typeface="Montserrat" panose="00000500000000000000" pitchFamily="2" charset="0"/>
-              </a:rPr>
-              <a:t>Matheus de Oliveira Vieira</a:t>
-            </a:r>
-          </a:p>
-          <a:p>
-            <a:pPr lvl="0">
-              <a:lnSpc>
-                <a:spcPct val="150000"/>
-              </a:lnSpc>
-            </a:pPr>
-            <a:r>
-              <a:rPr lang="pt-BR" sz="1100" dirty="0">
-                <a:solidFill>
-                  <a:schemeClr val="bg1"/>
-                </a:solidFill>
-                <a:latin typeface="Montserrat" panose="00000500000000000000" pitchFamily="2" charset="0"/>
-              </a:rPr>
               <a:t>Valdinei de Souza Camargo</a:t>
             </a:r>
-          </a:p>
-          <a:p>
-            <a:pPr lvl="0">
-              <a:lnSpc>
-                <a:spcPct val="150000"/>
-              </a:lnSpc>
-            </a:pPr>
-            <a:r>
-              <a:rPr lang="pt-BR" sz="1100" dirty="0" err="1">
-                <a:solidFill>
-                  <a:schemeClr val="bg1"/>
-                </a:solidFill>
-                <a:latin typeface="Montserrat" panose="00000500000000000000" pitchFamily="2" charset="0"/>
-              </a:rPr>
-              <a:t>Walison</a:t>
-            </a:r>
-            <a:r>
-              <a:rPr lang="pt-BR" sz="1100" dirty="0">
-                <a:solidFill>
-                  <a:schemeClr val="bg1"/>
-                </a:solidFill>
-                <a:latin typeface="Montserrat" panose="00000500000000000000" pitchFamily="2" charset="0"/>
-              </a:rPr>
-              <a:t> Carlos da Silva</a:t>
-            </a:r>
-            <a:endParaRPr lang="pt-BR" sz="1200" dirty="0">
-              <a:solidFill>
-                <a:schemeClr val="bg1"/>
-              </a:solidFill>
-              <a:latin typeface="Montserrat" panose="00000500000000000000" pitchFamily="2" charset="0"/>
-            </a:endParaRPr>
           </a:p>
         </p:txBody>
       </p:sp>
